--- a/test1.pptx
+++ b/test1.pptx
@@ -364,7 +364,7 @@
             <a:pPr indent="0" algn="r">
               <a:buNone/>
             </a:pPr>
-            <a:fld id="{45D8F4C4-6DD8-4C99-BCAC-E200DE0225E8}" type="slidenum">
+            <a:fld id="{547B0D25-03E4-49D0-BEC6-E85B3683BC03}" type="slidenum">
               <a:rPr lang="en-US" sz="1400" b="0" u="none" strike="noStrike">
                 <a:solidFill>
                   <a:srgbClr val="000000"/>
@@ -1645,7 +1645,7 @@
               </a:lnSpc>
               <a:buNone/>
             </a:pPr>
-            <a:fld id="{D866B63D-EDA3-4BA3-8444-D1E26B88C4EE}" type="slidenum">
+            <a:fld id="{33766E1F-8BFD-4FE6-9995-04B5B091A6C6}" type="slidenum">
               <a:rPr lang="en-US" sz="1200" b="0" u="none" strike="noStrike">
                 <a:solidFill>
                   <a:schemeClr val="dk1">
@@ -2354,7 +2354,7 @@
               </a:lnSpc>
               <a:buNone/>
             </a:pPr>
-            <a:fld id="{E1A4956F-0AAA-4075-A336-4E3294C61C5D}" type="slidenum">
+            <a:fld id="{4B785E48-7D98-4429-989E-EFD97524FF41}" type="slidenum">
               <a:rPr lang="en-US" sz="1200" b="0" u="none" strike="noStrike">
                 <a:solidFill>
                   <a:schemeClr val="dk1">
@@ -3229,7 +3229,7 @@
               </a:lnSpc>
               <a:buNone/>
             </a:pPr>
-            <a:fld id="{4FE7D9C5-84C5-46F0-817E-5A1B205E949D}" type="slidenum">
+            <a:fld id="{4275FA3A-F8C1-499F-BFC5-D930F7764147}" type="slidenum">
               <a:rPr lang="en-US" sz="1200" b="0" u="none" strike="noStrike">
                 <a:solidFill>
                   <a:schemeClr val="dk1">
@@ -3854,7 +3854,7 @@
               </a:lnSpc>
               <a:buNone/>
             </a:pPr>
-            <a:fld id="{6E3186B4-2708-4D9B-B029-DDAF059984F0}" type="slidenum">
+            <a:fld id="{58C15AF7-779D-46A8-9F22-E3D8B1082B82}" type="slidenum">
               <a:rPr lang="en-US" sz="1200" b="0" u="none" strike="noStrike">
                 <a:solidFill>
                   <a:schemeClr val="dk1">
@@ -4479,7 +4479,7 @@
               </a:lnSpc>
               <a:buNone/>
             </a:pPr>
-            <a:fld id="{1DA1612F-A62A-4BE0-8314-9A4E63ED1AFD}" type="slidenum">
+            <a:fld id="{3988BB31-FE13-4658-80A2-F45C006A0379}" type="slidenum">
               <a:rPr lang="en-US" sz="1200" b="0" u="none" strike="noStrike">
                 <a:solidFill>
                   <a:schemeClr val="dk1">
@@ -5104,7 +5104,7 @@
               </a:lnSpc>
               <a:buNone/>
             </a:pPr>
-            <a:fld id="{DF1864BC-E085-42DE-9803-4033BC81B518}" type="slidenum">
+            <a:fld id="{E615A7D1-F1A0-421C-9FF0-942D62EA382F}" type="slidenum">
               <a:rPr lang="en-US" sz="1200" b="0" u="none" strike="noStrike">
                 <a:solidFill>
                   <a:schemeClr val="dk1">
@@ -5513,7 +5513,7 @@
               </a:lnSpc>
               <a:buNone/>
             </a:pPr>
-            <a:fld id="{AAA36E06-1ACA-4B1F-9F7B-180802D03875}" type="slidenum">
+            <a:fld id="{D72094BE-AD26-420B-8655-69AD4FAB26F9}" type="slidenum">
               <a:rPr lang="en-US" sz="1200" b="0" u="none" strike="noStrike">
                 <a:solidFill>
                   <a:schemeClr val="dk1">
@@ -6444,7 +6444,7 @@
               </a:lnSpc>
               <a:buNone/>
             </a:pPr>
-            <a:fld id="{1F1FEA2C-0EFE-46A1-B17D-327B067D2236}" type="slidenum">
+            <a:fld id="{64A778BA-C2D8-408C-B888-B389C6FBC340}" type="slidenum">
               <a:rPr lang="en-US" sz="1200" b="0" u="none" strike="noStrike">
                 <a:solidFill>
                   <a:schemeClr val="dk1">
@@ -7603,7 +7603,7 @@
               </a:lnSpc>
               <a:buNone/>
             </a:pPr>
-            <a:fld id="{CE46CFEE-267A-46DF-8424-7680B59C9291}" type="slidenum">
+            <a:fld id="{5E27339B-0F43-4EC4-8CED-B149040A9AFA}" type="slidenum">
               <a:rPr lang="en-US" sz="1200" b="0" u="none" strike="noStrike">
                 <a:solidFill>
                   <a:schemeClr val="dk1">
@@ -7922,7 +7922,7 @@
               </a:lnSpc>
               <a:buNone/>
             </a:pPr>
-            <a:fld id="{F43546F4-FF54-407A-872D-C5E77803FF4C}" type="slidenum">
+            <a:fld id="{586A7379-6F56-4B72-B3AF-E62FD2696581}" type="slidenum">
               <a:rPr lang="en-US" sz="1200" b="0" u="none" strike="noStrike">
                 <a:solidFill>
                   <a:schemeClr val="dk1">
@@ -8169,7 +8169,7 @@
               </a:lnSpc>
               <a:buNone/>
             </a:pPr>
-            <a:fld id="{C063BAEF-D431-4333-AA89-556524BFC6BD}" type="slidenum">
+            <a:fld id="{8E006368-E7CA-433E-A7C7-41C320EEA552}" type="slidenum">
               <a:rPr lang="en-US" sz="1200" b="0" u="none" strike="noStrike">
                 <a:solidFill>
                   <a:schemeClr val="dk1">
@@ -9502,7 +9502,7 @@
                     <a:uFillTx/>
                     <a:latin typeface="Montserrat"/>
                   </a:rPr>
-                  <a:t>Models evolve rapidly, agnostic architecture can adapt to better/cheaper models</a:t>
+                  <a:t>Models evolve rapidly, flexible architecture can adapt to better/cheaper models</a:t>
                 </a:r>
                 <a:endParaRPr lang="en-US" sz="1200" b="0" u="none" strike="noStrike">
                   <a:solidFill>
@@ -11008,7 +11008,7 @@
           </p:blipFill>
           <p:spPr>
             <a:xfrm>
-              <a:off x="7250400" y="2567160"/>
+              <a:off x="7250400" y="2603160"/>
               <a:ext cx="914400" cy="914400"/>
             </a:xfrm>
             <a:prstGeom prst="rect">
@@ -11098,7 +11098,7 @@
           </p:blipFill>
           <p:spPr>
             <a:xfrm>
-              <a:off x="4114440" y="2634120"/>
+              <a:off x="4150440" y="2562120"/>
               <a:ext cx="914400" cy="914400"/>
             </a:xfrm>
             <a:prstGeom prst="rect">
@@ -11128,7 +11128,7 @@
           </p:blipFill>
           <p:spPr>
             <a:xfrm>
-              <a:off x="7260120" y="4438080"/>
+              <a:off x="5698800" y="3515760"/>
               <a:ext cx="914400" cy="914400"/>
             </a:xfrm>
             <a:prstGeom prst="rect">
@@ -11158,7 +11158,7 @@
           </p:blipFill>
           <p:spPr>
             <a:xfrm>
-              <a:off x="5698800" y="3515760"/>
+              <a:off x="7250400" y="4408200"/>
               <a:ext cx="914400" cy="914400"/>
             </a:xfrm>
             <a:prstGeom prst="rect">

--- a/test1.pptx
+++ b/test1.pptx
@@ -364,7 +364,7 @@
             <a:pPr indent="0" algn="r">
               <a:buNone/>
             </a:pPr>
-            <a:fld id="{547B0D25-03E4-49D0-BEC6-E85B3683BC03}" type="slidenum">
+            <a:fld id="{1E1A7E60-6C5D-4101-BB3F-B2F66B61FB90}" type="slidenum">
               <a:rPr lang="en-US" sz="1400" b="0" u="none" strike="noStrike">
                 <a:solidFill>
                   <a:srgbClr val="000000"/>
@@ -1645,7 +1645,7 @@
               </a:lnSpc>
               <a:buNone/>
             </a:pPr>
-            <a:fld id="{33766E1F-8BFD-4FE6-9995-04B5B091A6C6}" type="slidenum">
+            <a:fld id="{5BAA2F9B-2418-4B40-9F1B-71358A09F519}" type="slidenum">
               <a:rPr lang="en-US" sz="1200" b="0" u="none" strike="noStrike">
                 <a:solidFill>
                   <a:schemeClr val="dk1">
@@ -2354,7 +2354,7 @@
               </a:lnSpc>
               <a:buNone/>
             </a:pPr>
-            <a:fld id="{4B785E48-7D98-4429-989E-EFD97524FF41}" type="slidenum">
+            <a:fld id="{03E20B9C-6778-4C5C-9EEA-A9FA137CAC55}" type="slidenum">
               <a:rPr lang="en-US" sz="1200" b="0" u="none" strike="noStrike">
                 <a:solidFill>
                   <a:schemeClr val="dk1">
@@ -3229,7 +3229,7 @@
               </a:lnSpc>
               <a:buNone/>
             </a:pPr>
-            <a:fld id="{4275FA3A-F8C1-499F-BFC5-D930F7764147}" type="slidenum">
+            <a:fld id="{78E7977C-21DD-4CE4-A6D9-96E6D1092914}" type="slidenum">
               <a:rPr lang="en-US" sz="1200" b="0" u="none" strike="noStrike">
                 <a:solidFill>
                   <a:schemeClr val="dk1">
@@ -3854,7 +3854,7 @@
               </a:lnSpc>
               <a:buNone/>
             </a:pPr>
-            <a:fld id="{58C15AF7-779D-46A8-9F22-E3D8B1082B82}" type="slidenum">
+            <a:fld id="{0513FA2E-16B5-42AE-A789-9EBD900F3A69}" type="slidenum">
               <a:rPr lang="en-US" sz="1200" b="0" u="none" strike="noStrike">
                 <a:solidFill>
                   <a:schemeClr val="dk1">
@@ -4479,7 +4479,7 @@
               </a:lnSpc>
               <a:buNone/>
             </a:pPr>
-            <a:fld id="{3988BB31-FE13-4658-80A2-F45C006A0379}" type="slidenum">
+            <a:fld id="{18ED5D42-F401-43B9-95F9-20F93EBB2D89}" type="slidenum">
               <a:rPr lang="en-US" sz="1200" b="0" u="none" strike="noStrike">
                 <a:solidFill>
                   <a:schemeClr val="dk1">
@@ -5104,7 +5104,7 @@
               </a:lnSpc>
               <a:buNone/>
             </a:pPr>
-            <a:fld id="{E615A7D1-F1A0-421C-9FF0-942D62EA382F}" type="slidenum">
+            <a:fld id="{A9F1842C-1829-4E04-9D49-7EFF43AFD49A}" type="slidenum">
               <a:rPr lang="en-US" sz="1200" b="0" u="none" strike="noStrike">
                 <a:solidFill>
                   <a:schemeClr val="dk1">
@@ -5513,7 +5513,7 @@
               </a:lnSpc>
               <a:buNone/>
             </a:pPr>
-            <a:fld id="{D72094BE-AD26-420B-8655-69AD4FAB26F9}" type="slidenum">
+            <a:fld id="{A9A7C56A-93C7-4242-A84E-417317D7BEA2}" type="slidenum">
               <a:rPr lang="en-US" sz="1200" b="0" u="none" strike="noStrike">
                 <a:solidFill>
                   <a:schemeClr val="dk1">
@@ -6444,7 +6444,7 @@
               </a:lnSpc>
               <a:buNone/>
             </a:pPr>
-            <a:fld id="{64A778BA-C2D8-408C-B888-B389C6FBC340}" type="slidenum">
+            <a:fld id="{36069536-3BFA-40A5-BC23-233C6B8ACA9F}" type="slidenum">
               <a:rPr lang="en-US" sz="1200" b="0" u="none" strike="noStrike">
                 <a:solidFill>
                   <a:schemeClr val="dk1">
@@ -7603,7 +7603,7 @@
               </a:lnSpc>
               <a:buNone/>
             </a:pPr>
-            <a:fld id="{5E27339B-0F43-4EC4-8CED-B149040A9AFA}" type="slidenum">
+            <a:fld id="{F4CA96AC-0FAF-4622-B510-436D0079C166}" type="slidenum">
               <a:rPr lang="en-US" sz="1200" b="0" u="none" strike="noStrike">
                 <a:solidFill>
                   <a:schemeClr val="dk1">
@@ -7922,7 +7922,7 @@
               </a:lnSpc>
               <a:buNone/>
             </a:pPr>
-            <a:fld id="{586A7379-6F56-4B72-B3AF-E62FD2696581}" type="slidenum">
+            <a:fld id="{1BCEBBA3-9706-400B-A631-1AF29CD0BD3D}" type="slidenum">
               <a:rPr lang="en-US" sz="1200" b="0" u="none" strike="noStrike">
                 <a:solidFill>
                   <a:schemeClr val="dk1">
@@ -8169,7 +8169,7 @@
               </a:lnSpc>
               <a:buNone/>
             </a:pPr>
-            <a:fld id="{8E006368-E7CA-433E-A7C7-41C320EEA552}" type="slidenum">
+            <a:fld id="{E3149F75-6A90-4A37-8D5B-01A87D4B62B2}" type="slidenum">
               <a:rPr lang="en-US" sz="1200" b="0" u="none" strike="noStrike">
                 <a:solidFill>
                   <a:schemeClr val="dk1">
@@ -9415,9 +9415,9 @@
           <p:grpSpPr>
             <a:xfrm>
               <a:off x="1639800" y="1632960"/>
-              <a:ext cx="2144880" cy="4828680"/>
+              <a:ext cx="2144880" cy="4646520"/>
               <a:chOff x="1639800" y="1632960"/>
-              <a:chExt cx="2144880" cy="4828680"/>
+              <a:chExt cx="2144880" cy="4646520"/>
             </a:xfrm>
           </p:grpSpPr>
           <p:sp>
@@ -9429,7 +9429,7 @@
             <p:spPr>
               <a:xfrm>
                 <a:off x="1639800" y="5419440"/>
-                <a:ext cx="2144880" cy="1042200"/>
+                <a:ext cx="2144880" cy="860040"/>
               </a:xfrm>
               <a:prstGeom prst="rect">
                 <a:avLst/>
@@ -9502,7 +9502,7 @@
                     <a:uFillTx/>
                     <a:latin typeface="Montserrat"/>
                   </a:rPr>
-                  <a:t>Models evolve rapidly, flexible architecture can adapt to better/cheaper models</a:t>
+                  <a:t>Models evolve rapidly, flexible architecture can adapt to better models</a:t>
                 </a:r>
                 <a:endParaRPr lang="en-US" sz="1200" b="0" u="none" strike="noStrike">
                   <a:solidFill>
